--- a/classes/parte-1-redes-y-seguridad-de-redes/032-nmap-scripting-engine-nse/clase-032-presentacion.pptx
+++ b/classes/parte-1-redes-y-seguridad-de-redes/032-nmap-scripting-engine-nse/clase-032-presentacion.pptx
@@ -17,6 +17,9 @@
     <p:sldId id="265" r:id="rId16"/>
     <p:sldId id="266" r:id="rId17"/>
     <p:sldId id="267" r:id="rId18"/>
+    <p:sldId id="268" r:id="rId19"/>
+    <p:sldId id="269" r:id="rId20"/>
+    <p:sldId id="270" r:id="rId21"/>
   </p:sldIdLst>
   <p:sldSz cx="9144000" cy="6858000" type="screen4x3"/>
   <p:notesSz cx="6858000" cy="9144000"/>
@@ -3198,7 +3201,7 @@
                   <a:srgbClr val="0B3D2E"/>
                 </a:solidFill>
               </a:rPr>
-              <a:t>⚠️ Errores comunes</a:t>
+              <a:t>✍️ Ejercicios</a:t>
             </a:r>
           </a:p>
         </p:txBody>
@@ -3236,67 +3239,82 @@
                   <a:srgbClr val="22282E"/>
                 </a:solidFill>
               </a:rPr>
-              <a:t>•  "'X' did not match a category, filename, or directory" — Nombre de script mal escrito o base sin actualizar; corre --script-updatedb</a:t>
-            </a:r>
-          </a:p>
-          <a:p>
-            <a:pPr>
-              <a:spcAft>
-                <a:spcPts val="600"/>
-              </a:spcAft>
-            </a:pPr>
-            <a:r>
-              <a:rPr sz="1500">
-                <a:solidFill>
-                  <a:srgbClr val="22282E"/>
-                </a:solidFill>
-              </a:rPr>
-              <a:t>•  Script no devuelve nada — El portrule no se cumple (puerto cerrado o servicio distinto); verifica con -sV</a:t>
-            </a:r>
-          </a:p>
-          <a:p>
-            <a:pPr>
-              <a:spcAft>
-                <a:spcPts val="600"/>
-              </a:spcAft>
-            </a:pPr>
-            <a:r>
-              <a:rPr sz="1500">
-                <a:solidFill>
-                  <a:srgbClr val="22282E"/>
-                </a:solidFill>
-              </a:rPr>
-              <a:t>•  Escaneo vuln tumba el servicio — Usaste scripts intrusivos; limita a safe/default fuera del laboratorio</a:t>
-            </a:r>
-          </a:p>
-          <a:p>
-            <a:pPr>
-              <a:spcAft>
-                <a:spcPts val="600"/>
-              </a:spcAft>
-            </a:pPr>
-            <a:r>
-              <a:rPr sz="1500">
-                <a:solidFill>
-                  <a:srgbClr val="22282E"/>
-                </a:solidFill>
-              </a:rPr>
-              <a:t>•  Argumentos ignorados — Formato incorrecto de --script-args; usa clave=valor separados por coma</a:t>
-            </a:r>
-          </a:p>
-          <a:p>
-            <a:pPr>
-              <a:spcAft>
-                <a:spcPts val="600"/>
-              </a:spcAft>
-            </a:pPr>
-            <a:r>
-              <a:rPr sz="1500">
-                <a:solidFill>
-                  <a:srgbClr val="22282E"/>
-                </a:solidFill>
-              </a:rPr>
-              <a:t>•  Salida de brute sin resultados — Diccionario inadecuado o cuenta bloqueada; ajusta userdb/passdb (solo en laboratorio)</a:t>
+              <a:t>•  Lista todos los scripts de la categoría vuln con ls /usr/share/nmap/scripts/ | grep vuln y elige tres para leer su --script-help.</a:t>
+            </a:r>
+          </a:p>
+          <a:p>
+            <a:pPr>
+              <a:spcAft>
+                <a:spcPts val="600"/>
+              </a:spcAft>
+            </a:pPr>
+            <a:r>
+              <a:rPr sz="1500">
+                <a:solidFill>
+                  <a:srgbClr val="22282E"/>
+                </a:solidFill>
+              </a:rPr>
+              <a:t>•  Ejecuta -sC y explica qué información añadió cada script a la salida.</a:t>
+            </a:r>
+          </a:p>
+          <a:p>
+            <a:pPr>
+              <a:spcAft>
+                <a:spcPts val="600"/>
+              </a:spcAft>
+            </a:pPr>
+            <a:r>
+              <a:rPr sz="1500">
+                <a:solidFill>
+                  <a:srgbClr val="22282E"/>
+                </a:solidFill>
+              </a:rPr>
+              <a:t>•  Usa ssl-enum-ciphers y evalúa si el objetivo soporta cifradores débiles.</a:t>
+            </a:r>
+          </a:p>
+          <a:p>
+            <a:pPr>
+              <a:spcAft>
+                <a:spcPts val="600"/>
+              </a:spcAft>
+            </a:pPr>
+            <a:r>
+              <a:rPr sz="1500">
+                <a:solidFill>
+                  <a:srgbClr val="22282E"/>
+                </a:solidFill>
+              </a:rPr>
+              <a:t>•  Modifica hello.nse para que también imprima el nombre del servicio detectado.</a:t>
+            </a:r>
+          </a:p>
+          <a:p>
+            <a:pPr>
+              <a:spcAft>
+                <a:spcPts val="600"/>
+              </a:spcAft>
+            </a:pPr>
+            <a:r>
+              <a:rPr sz="1500">
+                <a:solidFill>
+                  <a:srgbClr val="22282E"/>
+                </a:solidFill>
+              </a:rPr>
+              <a:t>•  Combina -sV con --script banner y compara con la detección de versión nativa.</a:t>
+            </a:r>
+          </a:p>
+          <a:p>
+            <a:pPr>
+              <a:spcAft>
+                <a:spcPts val="600"/>
+              </a:spcAft>
+            </a:pPr>
+            <a:r>
+              <a:rPr sz="1500">
+                <a:solidFill>
+                  <a:srgbClr val="22282E"/>
+                </a:solidFill>
+              </a:rPr>
+              <a:t>•  Investiga la diferencia entre un portrule y un hostrule en NSE.</a:t>
             </a:r>
           </a:p>
         </p:txBody>
@@ -3347,7 +3365,7 @@
                   <a:srgbClr val="0B3D2E"/>
                 </a:solidFill>
               </a:rPr>
-              <a:t>❓ Preguntas frecuentes</a:t>
+              <a:t>📝 Reto verificable</a:t>
             </a:r>
           </a:p>
         </p:txBody>
@@ -3385,97 +3403,22 @@
                   <a:srgbClr val="22282E"/>
                 </a:solidFill>
               </a:rPr>
-              <a:t>•  ❓ ¿-sC es lo mismo que --script default?</a:t>
-            </a:r>
-          </a:p>
-          <a:p>
-            <a:pPr>
-              <a:spcAft>
-                <a:spcPts val="600"/>
-              </a:spcAft>
-            </a:pPr>
-            <a:r>
-              <a:rPr sz="1500">
-                <a:solidFill>
-                  <a:srgbClr val="22282E"/>
-                </a:solidFill>
-              </a:rPr>
-              <a:t>•  Sí. -sC ejecuta todos los scripts de la categoría default, considerados seguros y útiles para un escaneo general.</a:t>
-            </a:r>
-          </a:p>
-          <a:p>
-            <a:pPr>
-              <a:spcAft>
-                <a:spcPts val="600"/>
-              </a:spcAft>
-            </a:pPr>
-            <a:r>
-              <a:rPr sz="1500">
-                <a:solidFill>
-                  <a:srgbClr val="22282E"/>
-                </a:solidFill>
-              </a:rPr>
-              <a:t>•  ❓ ¿Los scripts vuln explotan la vulnerabilidad?</a:t>
-            </a:r>
-          </a:p>
-          <a:p>
-            <a:pPr>
-              <a:spcAft>
-                <a:spcPts val="600"/>
-              </a:spcAft>
-            </a:pPr>
-            <a:r>
-              <a:rPr sz="1500">
-                <a:solidFill>
-                  <a:srgbClr val="22282E"/>
-                </a:solidFill>
-              </a:rPr>
-              <a:t>•  Normalmente solo la detectan. Los que explotan están en la categoría exploit y son mucho más peligrosos; úsalos con extremo cuidado y solo con permiso.</a:t>
-            </a:r>
-          </a:p>
-          <a:p>
-            <a:pPr>
-              <a:spcAft>
-                <a:spcPts val="600"/>
-              </a:spcAft>
-            </a:pPr>
-            <a:r>
-              <a:rPr sz="1500">
-                <a:solidFill>
-                  <a:srgbClr val="22282E"/>
-                </a:solidFill>
-              </a:rPr>
-              <a:t>•  ❓ ¿En qué lenguaje se escriben los scripts?</a:t>
-            </a:r>
-          </a:p>
-          <a:p>
-            <a:pPr>
-              <a:spcAft>
-                <a:spcPts val="600"/>
-              </a:spcAft>
-            </a:pPr>
-            <a:r>
-              <a:rPr sz="1500">
-                <a:solidFill>
-                  <a:srgbClr val="22282E"/>
-                </a:solidFill>
-              </a:rPr>
-              <a:t>•  En Lua, usando las librerías NSE (nmap, shortport, http, etc.). Son fáciles de leer y modificar.</a:t>
-            </a:r>
-          </a:p>
-          <a:p>
-            <a:pPr>
-              <a:spcAft>
-                <a:spcPts val="600"/>
-              </a:spcAft>
-            </a:pPr>
-            <a:r>
-              <a:rPr sz="1500">
-                <a:solidFill>
-                  <a:srgbClr val="22282E"/>
-                </a:solidFill>
-              </a:rPr>
-              <a:t>•  ❓ ¿Cómo sé qué hace un script antes de ejecutarlo?</a:t>
+              <a:t>•  Escribe (o adapta) un escaneo NSE que enumere un servicio web de tu laboratorio y produzca: título de la página, cabeceras de seguridad presentes/ausentes y cifradores TLS soportados. Entrega el…</a:t>
+            </a:r>
+          </a:p>
+          <a:p>
+            <a:pPr>
+              <a:spcAft>
+                <a:spcPts val="600"/>
+              </a:spcAft>
+            </a:pPr>
+            <a:r>
+              <a:rPr sz="1500">
+                <a:solidFill>
+                  <a:srgbClr val="22282E"/>
+                </a:solidFill>
+              </a:rPr>
+              <a:t>•  Criterio de aceptación: la salida incluye los tres bloques de información y la interpretación identifica correctamente al menos una debilidad real (p. ej. falta de HSTS o soporte de un cifrador…</a:t>
             </a:r>
           </a:p>
         </p:txBody>
@@ -3526,7 +3469,7 @@
                   <a:srgbClr val="0B3D2E"/>
                 </a:solidFill>
               </a:rPr>
-              <a:t>🔗 Referencias</a:t>
+              <a:t>⚠️ Errores comunes</a:t>
             </a:r>
           </a:p>
         </p:txBody>
@@ -3564,6 +3507,334 @@
                   <a:srgbClr val="22282E"/>
                 </a:solidFill>
               </a:rPr>
+              <a:t>•  "'X' did not match a category, filename, or directory" — Nombre de script mal escrito o base sin actualizar; corre --script-updatedb</a:t>
+            </a:r>
+          </a:p>
+          <a:p>
+            <a:pPr>
+              <a:spcAft>
+                <a:spcPts val="600"/>
+              </a:spcAft>
+            </a:pPr>
+            <a:r>
+              <a:rPr sz="1500">
+                <a:solidFill>
+                  <a:srgbClr val="22282E"/>
+                </a:solidFill>
+              </a:rPr>
+              <a:t>•  Script no devuelve nada — El portrule no se cumple (puerto cerrado o servicio distinto); verifica con -sV</a:t>
+            </a:r>
+          </a:p>
+          <a:p>
+            <a:pPr>
+              <a:spcAft>
+                <a:spcPts val="600"/>
+              </a:spcAft>
+            </a:pPr>
+            <a:r>
+              <a:rPr sz="1500">
+                <a:solidFill>
+                  <a:srgbClr val="22282E"/>
+                </a:solidFill>
+              </a:rPr>
+              <a:t>•  Escaneo vuln tumba el servicio — Usaste scripts intrusivos; limita a safe/default fuera del laboratorio</a:t>
+            </a:r>
+          </a:p>
+          <a:p>
+            <a:pPr>
+              <a:spcAft>
+                <a:spcPts val="600"/>
+              </a:spcAft>
+            </a:pPr>
+            <a:r>
+              <a:rPr sz="1500">
+                <a:solidFill>
+                  <a:srgbClr val="22282E"/>
+                </a:solidFill>
+              </a:rPr>
+              <a:t>•  Argumentos ignorados — Formato incorrecto de --script-args; usa clave=valor separados por coma</a:t>
+            </a:r>
+          </a:p>
+          <a:p>
+            <a:pPr>
+              <a:spcAft>
+                <a:spcPts val="600"/>
+              </a:spcAft>
+            </a:pPr>
+            <a:r>
+              <a:rPr sz="1500">
+                <a:solidFill>
+                  <a:srgbClr val="22282E"/>
+                </a:solidFill>
+              </a:rPr>
+              <a:t>•  Salida de brute sin resultados — Diccionario inadecuado o cuenta bloqueada; ajusta userdb/passdb (solo en laboratorio)</a:t>
+            </a:r>
+          </a:p>
+        </p:txBody>
+      </p:sp>
+    </p:spTree>
+  </p:cSld>
+  <p:clrMapOvr>
+    <a:masterClrMapping/>
+  </p:clrMapOvr>
+</p:sld>
+</file>
+
+<file path=ppt/slides/slide13.xml><?xml version="1.0" encoding="utf-8"?>
+<p:sld xmlns:a="http://schemas.openxmlformats.org/drawingml/2006/main" xmlns:p="http://schemas.openxmlformats.org/presentationml/2006/main" xmlns:r="http://schemas.openxmlformats.org/officeDocument/2006/relationships">
+  <p:cSld>
+    <p:spTree>
+      <p:nvGrpSpPr>
+        <p:cNvPr id="1" name=""/>
+        <p:cNvGrpSpPr/>
+        <p:nvPr/>
+      </p:nvGrpSpPr>
+      <p:grpSpPr/>
+      <p:sp>
+        <p:nvSpPr>
+          <p:cNvPr id="2" name="TextBox 1"/>
+          <p:cNvSpPr txBox="1"/>
+          <p:nvPr/>
+        </p:nvSpPr>
+        <p:spPr>
+          <a:xfrm>
+            <a:off x="457200" y="320040"/>
+            <a:ext cx="8229600" cy="822960"/>
+          </a:xfrm>
+          <a:prstGeom prst="rect">
+            <a:avLst/>
+          </a:prstGeom>
+          <a:noFill/>
+        </p:spPr>
+        <p:txBody>
+          <a:bodyPr wrap="square">
+            <a:spAutoFit/>
+          </a:bodyPr>
+          <a:lstStyle/>
+          <a:p>
+            <a:r>
+              <a:rPr sz="2600" b="1">
+                <a:solidFill>
+                  <a:srgbClr val="0B3D2E"/>
+                </a:solidFill>
+              </a:rPr>
+              <a:t>❓ Preguntas frecuentes</a:t>
+            </a:r>
+          </a:p>
+        </p:txBody>
+      </p:sp>
+      <p:sp>
+        <p:nvSpPr>
+          <p:cNvPr id="3" name="TextBox 2"/>
+          <p:cNvSpPr txBox="1"/>
+          <p:nvPr/>
+        </p:nvSpPr>
+        <p:spPr>
+          <a:xfrm>
+            <a:off x="457200" y="1280160"/>
+            <a:ext cx="8229600" cy="4937760"/>
+          </a:xfrm>
+          <a:prstGeom prst="rect">
+            <a:avLst/>
+          </a:prstGeom>
+          <a:noFill/>
+        </p:spPr>
+        <p:txBody>
+          <a:bodyPr wrap="square">
+            <a:spAutoFit/>
+          </a:bodyPr>
+          <a:lstStyle/>
+          <a:p>
+            <a:pPr>
+              <a:spcAft>
+                <a:spcPts val="600"/>
+              </a:spcAft>
+            </a:pPr>
+            <a:r>
+              <a:rPr sz="1500">
+                <a:solidFill>
+                  <a:srgbClr val="22282E"/>
+                </a:solidFill>
+              </a:rPr>
+              <a:t>•  ❓ ¿-sC es lo mismo que --script default?</a:t>
+            </a:r>
+          </a:p>
+          <a:p>
+            <a:pPr>
+              <a:spcAft>
+                <a:spcPts val="600"/>
+              </a:spcAft>
+            </a:pPr>
+            <a:r>
+              <a:rPr sz="1500">
+                <a:solidFill>
+                  <a:srgbClr val="22282E"/>
+                </a:solidFill>
+              </a:rPr>
+              <a:t>•  Sí. -sC ejecuta todos los scripts de la categoría default, considerados seguros y útiles para un escaneo general.</a:t>
+            </a:r>
+          </a:p>
+          <a:p>
+            <a:pPr>
+              <a:spcAft>
+                <a:spcPts val="600"/>
+              </a:spcAft>
+            </a:pPr>
+            <a:r>
+              <a:rPr sz="1500">
+                <a:solidFill>
+                  <a:srgbClr val="22282E"/>
+                </a:solidFill>
+              </a:rPr>
+              <a:t>•  ❓ ¿Los scripts vuln explotan la vulnerabilidad?</a:t>
+            </a:r>
+          </a:p>
+          <a:p>
+            <a:pPr>
+              <a:spcAft>
+                <a:spcPts val="600"/>
+              </a:spcAft>
+            </a:pPr>
+            <a:r>
+              <a:rPr sz="1500">
+                <a:solidFill>
+                  <a:srgbClr val="22282E"/>
+                </a:solidFill>
+              </a:rPr>
+              <a:t>•  Normalmente solo la detectan. Los que explotan están en la categoría exploit y son mucho más peligrosos; úsalos con extremo cuidado y solo con permiso.</a:t>
+            </a:r>
+          </a:p>
+          <a:p>
+            <a:pPr>
+              <a:spcAft>
+                <a:spcPts val="600"/>
+              </a:spcAft>
+            </a:pPr>
+            <a:r>
+              <a:rPr sz="1500">
+                <a:solidFill>
+                  <a:srgbClr val="22282E"/>
+                </a:solidFill>
+              </a:rPr>
+              <a:t>•  ❓ ¿En qué lenguaje se escriben los scripts?</a:t>
+            </a:r>
+          </a:p>
+          <a:p>
+            <a:pPr>
+              <a:spcAft>
+                <a:spcPts val="600"/>
+              </a:spcAft>
+            </a:pPr>
+            <a:r>
+              <a:rPr sz="1500">
+                <a:solidFill>
+                  <a:srgbClr val="22282E"/>
+                </a:solidFill>
+              </a:rPr>
+              <a:t>•  En Lua, usando las librerías NSE (nmap, shortport, http, etc.). Son fáciles de leer y modificar.</a:t>
+            </a:r>
+          </a:p>
+          <a:p>
+            <a:pPr>
+              <a:spcAft>
+                <a:spcPts val="600"/>
+              </a:spcAft>
+            </a:pPr>
+            <a:r>
+              <a:rPr sz="1500">
+                <a:solidFill>
+                  <a:srgbClr val="22282E"/>
+                </a:solidFill>
+              </a:rPr>
+              <a:t>•  ❓ ¿Cómo sé qué hace un script antes de ejecutarlo?</a:t>
+            </a:r>
+          </a:p>
+        </p:txBody>
+      </p:sp>
+    </p:spTree>
+  </p:cSld>
+  <p:clrMapOvr>
+    <a:masterClrMapping/>
+  </p:clrMapOvr>
+</p:sld>
+</file>
+
+<file path=ppt/slides/slide14.xml><?xml version="1.0" encoding="utf-8"?>
+<p:sld xmlns:a="http://schemas.openxmlformats.org/drawingml/2006/main" xmlns:p="http://schemas.openxmlformats.org/presentationml/2006/main" xmlns:r="http://schemas.openxmlformats.org/officeDocument/2006/relationships">
+  <p:cSld>
+    <p:spTree>
+      <p:nvGrpSpPr>
+        <p:cNvPr id="1" name=""/>
+        <p:cNvGrpSpPr/>
+        <p:nvPr/>
+      </p:nvGrpSpPr>
+      <p:grpSpPr/>
+      <p:sp>
+        <p:nvSpPr>
+          <p:cNvPr id="2" name="TextBox 1"/>
+          <p:cNvSpPr txBox="1"/>
+          <p:nvPr/>
+        </p:nvSpPr>
+        <p:spPr>
+          <a:xfrm>
+            <a:off x="457200" y="320040"/>
+            <a:ext cx="8229600" cy="822960"/>
+          </a:xfrm>
+          <a:prstGeom prst="rect">
+            <a:avLst/>
+          </a:prstGeom>
+          <a:noFill/>
+        </p:spPr>
+        <p:txBody>
+          <a:bodyPr wrap="square">
+            <a:spAutoFit/>
+          </a:bodyPr>
+          <a:lstStyle/>
+          <a:p>
+            <a:r>
+              <a:rPr sz="2600" b="1">
+                <a:solidFill>
+                  <a:srgbClr val="0B3D2E"/>
+                </a:solidFill>
+              </a:rPr>
+              <a:t>🔗 Referencias</a:t>
+            </a:r>
+          </a:p>
+        </p:txBody>
+      </p:sp>
+      <p:sp>
+        <p:nvSpPr>
+          <p:cNvPr id="3" name="TextBox 2"/>
+          <p:cNvSpPr txBox="1"/>
+          <p:nvPr/>
+        </p:nvSpPr>
+        <p:spPr>
+          <a:xfrm>
+            <a:off x="457200" y="1280160"/>
+            <a:ext cx="8229600" cy="4937760"/>
+          </a:xfrm>
+          <a:prstGeom prst="rect">
+            <a:avLst/>
+          </a:prstGeom>
+          <a:noFill/>
+        </p:spPr>
+        <p:txBody>
+          <a:bodyPr wrap="square">
+            <a:spAutoFit/>
+          </a:bodyPr>
+          <a:lstStyle/>
+          <a:p>
+            <a:pPr>
+              <a:spcAft>
+                <a:spcPts val="600"/>
+              </a:spcAft>
+            </a:pPr>
+            <a:r>
+              <a:rPr sz="1500">
+                <a:solidFill>
+                  <a:srgbClr val="22282E"/>
+                </a:solidFill>
+              </a:rPr>
               <a:t>•  Lyon, G. Nmap Network Scanning, cap. "Nmap Scripting Engine". &lt;https://nmap.org/book/nse.html&gt;</a:t>
             </a:r>
           </a:p>
@@ -3614,6 +3885,81 @@
           </a:p>
         </p:txBody>
       </p:sp>
+    </p:spTree>
+  </p:cSld>
+  <p:clrMapOvr>
+    <a:masterClrMapping/>
+  </p:clrMapOvr>
+</p:sld>
+</file>
+
+<file path=ppt/slides/slide15.xml><?xml version="1.0" encoding="utf-8"?>
+<p:sld xmlns:a="http://schemas.openxmlformats.org/drawingml/2006/main" xmlns:p="http://schemas.openxmlformats.org/presentationml/2006/main" xmlns:r="http://schemas.openxmlformats.org/officeDocument/2006/relationships">
+  <p:cSld>
+    <p:spTree>
+      <p:nvGrpSpPr>
+        <p:cNvPr id="1" name=""/>
+        <p:cNvGrpSpPr/>
+        <p:nvPr/>
+      </p:nvGrpSpPr>
+      <p:grpSpPr/>
+      <p:sp>
+        <p:nvSpPr>
+          <p:cNvPr id="2" name="TextBox 1"/>
+          <p:cNvSpPr txBox="1"/>
+          <p:nvPr/>
+        </p:nvSpPr>
+        <p:spPr>
+          <a:xfrm>
+            <a:off x="457200" y="274320"/>
+            <a:ext cx="8229600" cy="640080"/>
+          </a:xfrm>
+          <a:prstGeom prst="rect">
+            <a:avLst/>
+          </a:prstGeom>
+          <a:noFill/>
+        </p:spPr>
+        <p:txBody>
+          <a:bodyPr wrap="square">
+            <a:spAutoFit/>
+          </a:bodyPr>
+          <a:lstStyle/>
+          <a:p>
+            <a:r>
+              <a:rPr sz="2200" b="1">
+                <a:solidFill>
+                  <a:srgbClr val="0B3D2E"/>
+                </a:solidFill>
+              </a:rPr>
+              <a:t>Diagrama de la clase</a:t>
+            </a:r>
+          </a:p>
+        </p:txBody>
+      </p:sp>
+      <p:pic>
+        <p:nvPicPr>
+          <p:cNvPr id="3" name="Picture 2" descr="60a77f120f273560.png"/>
+          <p:cNvPicPr>
+            <a:picLocks noChangeAspect="1"/>
+          </p:cNvPicPr>
+          <p:nvPr/>
+        </p:nvPicPr>
+        <p:blipFill>
+          <a:blip r:embed="rId2"/>
+          <a:stretch>
+            <a:fillRect/>
+          </a:stretch>
+        </p:blipFill>
+        <p:spPr>
+          <a:xfrm>
+            <a:off x="2086552" y="1097280"/>
+            <a:ext cx="4970895" cy="5303520"/>
+          </a:xfrm>
+          <a:prstGeom prst="rect">
+            <a:avLst/>
+          </a:prstGeom>
+        </p:spPr>
+      </p:pic>
     </p:spTree>
   </p:cSld>
   <p:clrMapOvr>
@@ -3698,7 +4044,7 @@
                   <a:srgbClr val="22282E"/>
                 </a:solidFill>
               </a:rPr>
-              <a:t>•  Aprovechar el Nmap Scripting Engine para automatizar tareas de descubrimiento, detección de vulnerabilidades, enumeración y hasta explotación ligera mediante scripts en Lua. El alumno aprenderá a elegir scripts por categoría, pasarles argumentos, leer su salida y escribir un script mínimo propio.</a:t>
+              <a:t>•  Aprovechar el Nmap Scripting Engine para automatizar tareas de descubrimiento, detección de vulnerabilidades, enumeración y hasta explotación ligera mediante scripts en Lua. El alumno aprenderá a…</a:t>
             </a:r>
           </a:p>
         </p:txBody>
@@ -4107,7 +4453,7 @@
                   <a:srgbClr val="0B3D2E"/>
                 </a:solidFill>
               </a:rPr>
-              <a:t>📖 Definiciones y características</a:t>
+              <a:t>🧠 Explicación en profundidad</a:t>
             </a:r>
           </a:p>
         </p:txBody>
@@ -4145,67 +4491,97 @@
                   <a:srgbClr val="22282E"/>
                 </a:solidFill>
               </a:rPr>
-              <a:t>•  NSE: motor que ejecuta scripts Lua durante o después del escaneo, con acceso a los resultados de puertos y a librerías de red.</a:t>
-            </a:r>
-          </a:p>
-          <a:p>
-            <a:pPr>
-              <a:spcAft>
-                <a:spcPts val="600"/>
-              </a:spcAft>
-            </a:pPr>
-            <a:r>
-              <a:rPr sz="1500">
-                <a:solidFill>
-                  <a:srgbClr val="22282E"/>
-                </a:solidFill>
-              </a:rPr>
-              <a:t>•  Categoría: etiqueta que agrupa scripts por propósito y riesgo: safe, default, discovery, version, auth, brute, vuln, exploit, intrusive, dos, malware.</a:t>
-            </a:r>
-          </a:p>
-          <a:p>
-            <a:pPr>
-              <a:spcAft>
-                <a:spcPts val="600"/>
-              </a:spcAft>
-            </a:pPr>
-            <a:r>
-              <a:rPr sz="1500">
-                <a:solidFill>
-                  <a:srgbClr val="22282E"/>
-                </a:solidFill>
-              </a:rPr>
-              <a:t>•  --script-args: mecanismo para pasar parámetros (credenciales, rutas, límites) a los scripts.</a:t>
-            </a:r>
-          </a:p>
-          <a:p>
-            <a:pPr>
-              <a:spcAft>
-                <a:spcPts val="600"/>
-              </a:spcAft>
-            </a:pPr>
-            <a:r>
-              <a:rPr sz="1500">
-                <a:solidFill>
-                  <a:srgbClr val="22282E"/>
-                </a:solidFill>
-              </a:rPr>
-              <a:t>•  Script de vulnerabilidad: comprueba una debilidad concreta (p. ej. ssl-heartbleed) y reporta estado, referencias y a veces CVE.</a:t>
-            </a:r>
-          </a:p>
-          <a:p>
-            <a:pPr>
-              <a:spcAft>
-                <a:spcPts val="600"/>
-              </a:spcAft>
-            </a:pPr>
-            <a:r>
-              <a:rPr sz="1500">
-                <a:solidFill>
-                  <a:srgbClr val="22282E"/>
-                </a:solidFill>
-              </a:rPr>
-              <a:t>•  --script-help: muestra la documentación de un script sin ejecutarlo.</a:t>
+              <a:t>•  El Nmap Scripting Engine es un intérprete de Lua embebido en Nmap con acceso a</a:t>
+            </a:r>
+          </a:p>
+          <a:p>
+            <a:pPr>
+              <a:spcAft>
+                <a:spcPts val="600"/>
+              </a:spcAft>
+            </a:pPr>
+            <a:r>
+              <a:rPr sz="1500">
+                <a:solidFill>
+                  <a:srgbClr val="22282E"/>
+                </a:solidFill>
+              </a:rPr>
+              <a:t>•  todo lo que el escaneo ya descubrió y a librerías propias para hablar HTTP, SMB, SSH,</a:t>
+            </a:r>
+          </a:p>
+          <a:p>
+            <a:pPr>
+              <a:spcAft>
+                <a:spcPts val="600"/>
+              </a:spcAft>
+            </a:pPr>
+            <a:r>
+              <a:rPr sz="1500">
+                <a:solidFill>
+                  <a:srgbClr val="22282E"/>
+                </a:solidFill>
+              </a:rPr>
+              <a:t>•  DNS o SNMP. Eso cambia la naturaleza de la herramienta: Nmap deja de responder solo</a:t>
+            </a:r>
+          </a:p>
+          <a:p>
+            <a:pPr>
+              <a:spcAft>
+                <a:spcPts val="600"/>
+              </a:spcAft>
+            </a:pPr>
+            <a:r>
+              <a:rPr sz="1500">
+                <a:solidFill>
+                  <a:srgbClr val="22282E"/>
+                </a:solidFill>
+              </a:rPr>
+              <a:t>•  "¿qué hay aquí?" y pasa a responder "¿y qué puedo averiguar o comprobar sobre lo que</a:t>
+            </a:r>
+          </a:p>
+          <a:p>
+            <a:pPr>
+              <a:spcAft>
+                <a:spcPts val="600"/>
+              </a:spcAft>
+            </a:pPr>
+            <a:r>
+              <a:rPr sz="1500">
+                <a:solidFill>
+                  <a:srgbClr val="22282E"/>
+                </a:solidFill>
+              </a:rPr>
+              <a:t>•  hay?". La consulta de una zona DNS, la enumeración de comparticiones SMB, la lista de</a:t>
+            </a:r>
+          </a:p>
+          <a:p>
+            <a:pPr>
+              <a:spcAft>
+                <a:spcPts val="600"/>
+              </a:spcAft>
+            </a:pPr>
+            <a:r>
+              <a:rPr sz="1500">
+                <a:solidFill>
+                  <a:srgbClr val="22282E"/>
+                </a:solidFill>
+              </a:rPr>
+              <a:t>•  cifradores TLS aceptados por un servidor o la comprobación de una vulnerabilidad</a:t>
+            </a:r>
+          </a:p>
+          <a:p>
+            <a:pPr>
+              <a:spcAft>
+                <a:spcPts val="600"/>
+              </a:spcAft>
+            </a:pPr>
+            <a:r>
+              <a:rPr sz="1500">
+                <a:solidFill>
+                  <a:srgbClr val="22282E"/>
+                </a:solidFill>
+              </a:rPr>
+              <a:t>•  concreta son, todas, scripts NSE.</a:t>
             </a:r>
           </a:p>
         </p:txBody>
@@ -4256,7 +4632,7 @@
                   <a:srgbClr val="0B3D2E"/>
                 </a:solidFill>
               </a:rPr>
-              <a:t>🧰 Herramientas y preparación</a:t>
+              <a:t>📖 Definiciones y características</a:t>
             </a:r>
           </a:p>
         </p:txBody>
@@ -4294,52 +4670,67 @@
                   <a:srgbClr val="22282E"/>
                 </a:solidFill>
               </a:rPr>
-              <a:t>•  Nmap 7.x (incluye ~600 scripts NSE en /usr/share/nmap/scripts/).</a:t>
-            </a:r>
-          </a:p>
-          <a:p>
-            <a:pPr>
-              <a:spcAft>
-                <a:spcPts val="600"/>
-              </a:spcAft>
-            </a:pPr>
-            <a:r>
-              <a:rPr sz="1500">
-                <a:solidFill>
-                  <a:srgbClr val="22282E"/>
-                </a:solidFill>
-              </a:rPr>
-              <a:t>•  Actualiza la base de datos:</a:t>
-            </a:r>
-          </a:p>
-          <a:p>
-            <a:pPr>
-              <a:spcAft>
-                <a:spcPts val="600"/>
-              </a:spcAft>
-            </a:pPr>
-            <a:r>
-              <a:rPr sz="1500">
-                <a:solidFill>
-                  <a:srgbClr val="22282E"/>
-                </a:solidFill>
-              </a:rPr>
-              <a:t>•  sudo nmap --script-updatedb</a:t>
-            </a:r>
-          </a:p>
-          <a:p>
-            <a:pPr>
-              <a:spcAft>
-                <a:spcPts val="600"/>
-              </a:spcAft>
-            </a:pPr>
-            <a:r>
-              <a:rPr sz="1500">
-                <a:solidFill>
-                  <a:srgbClr val="22282E"/>
-                </a:solidFill>
-              </a:rPr>
-              <a:t>•  Objetivos de laboratorio: un servidor web, un SMB, un servicio con TLS. Contenedores deliberadamente vulnerables (aislados) para practicar scripts vuln.</a:t>
+              <a:t>•  NSE: motor que ejecuta scripts Lua durante o después del escaneo, con acceso a los resultados de puertos y a librerías de red.</a:t>
+            </a:r>
+          </a:p>
+          <a:p>
+            <a:pPr>
+              <a:spcAft>
+                <a:spcPts val="600"/>
+              </a:spcAft>
+            </a:pPr>
+            <a:r>
+              <a:rPr sz="1500">
+                <a:solidFill>
+                  <a:srgbClr val="22282E"/>
+                </a:solidFill>
+              </a:rPr>
+              <a:t>•  Categoría: etiqueta que agrupa scripts por propósito y riesgo: safe, default, discovery, version, auth, brute, vuln, exploit, intrusive, dos, malware.</a:t>
+            </a:r>
+          </a:p>
+          <a:p>
+            <a:pPr>
+              <a:spcAft>
+                <a:spcPts val="600"/>
+              </a:spcAft>
+            </a:pPr>
+            <a:r>
+              <a:rPr sz="1500">
+                <a:solidFill>
+                  <a:srgbClr val="22282E"/>
+                </a:solidFill>
+              </a:rPr>
+              <a:t>•  --script-args: mecanismo para pasar parámetros (credenciales, rutas, límites) a los scripts.</a:t>
+            </a:r>
+          </a:p>
+          <a:p>
+            <a:pPr>
+              <a:spcAft>
+                <a:spcPts val="600"/>
+              </a:spcAft>
+            </a:pPr>
+            <a:r>
+              <a:rPr sz="1500">
+                <a:solidFill>
+                  <a:srgbClr val="22282E"/>
+                </a:solidFill>
+              </a:rPr>
+              <a:t>•  Script de vulnerabilidad: comprueba una debilidad concreta (p. ej. ssl-heartbleed) y reporta estado, referencias y a veces CVE.</a:t>
+            </a:r>
+          </a:p>
+          <a:p>
+            <a:pPr>
+              <a:spcAft>
+                <a:spcPts val="600"/>
+              </a:spcAft>
+            </a:pPr>
+            <a:r>
+              <a:rPr sz="1500">
+                <a:solidFill>
+                  <a:srgbClr val="22282E"/>
+                </a:solidFill>
+              </a:rPr>
+              <a:t>•  --script-help: muestra la documentación de un script sin ejecutarlo.</a:t>
             </a:r>
           </a:p>
         </p:txBody>
@@ -4390,7 +4781,7 @@
                   <a:srgbClr val="0B3D2E"/>
                 </a:solidFill>
               </a:rPr>
-              <a:t>🧪 Laboratorio guiado</a:t>
+              <a:t>📔 Glosario</a:t>
             </a:r>
           </a:p>
         </p:txBody>
@@ -4428,97 +4819,97 @@
                   <a:srgbClr val="22282E"/>
                 </a:solidFill>
               </a:rPr>
-              <a:t>•  Scripts por defecto (categoría default, seguros y útiles):</a:t>
-            </a:r>
-          </a:p>
-          <a:p>
-            <a:pPr>
-              <a:spcAft>
-                <a:spcPts val="600"/>
-              </a:spcAft>
-            </a:pPr>
-            <a:r>
-              <a:rPr sz="1500">
-                <a:solidFill>
-                  <a:srgbClr val="22282E"/>
-                </a:solidFill>
-              </a:rPr>
-              <a:t>•  sudo nmap -sC 192.168.56.101</a:t>
-            </a:r>
-          </a:p>
-          <a:p>
-            <a:pPr>
-              <a:spcAft>
-                <a:spcPts val="600"/>
-              </a:spcAft>
-            </a:pPr>
-            <a:r>
-              <a:rPr sz="1500">
-                <a:solidFill>
-                  <a:srgbClr val="22282E"/>
-                </a:solidFill>
-              </a:rPr>
-              <a:t>•  Enumeración HTTP:</a:t>
-            </a:r>
-          </a:p>
-          <a:p>
-            <a:pPr>
-              <a:spcAft>
-                <a:spcPts val="600"/>
-              </a:spcAft>
-            </a:pPr>
-            <a:r>
-              <a:rPr sz="1500">
-                <a:solidFill>
-                  <a:srgbClr val="22282E"/>
-                </a:solidFill>
-              </a:rPr>
-              <a:t>•  sudo nmap -p80 --script http-title,http-headers,http-enum 192.168.56.101</a:t>
-            </a:r>
-          </a:p>
-          <a:p>
-            <a:pPr>
-              <a:spcAft>
-                <a:spcPts val="600"/>
-              </a:spcAft>
-            </a:pPr>
-            <a:r>
-              <a:rPr sz="1500">
-                <a:solidFill>
-                  <a:srgbClr val="22282E"/>
-                </a:solidFill>
-              </a:rPr>
-              <a:t>•  Enumeración SMB:</a:t>
-            </a:r>
-          </a:p>
-          <a:p>
-            <a:pPr>
-              <a:spcAft>
-                <a:spcPts val="600"/>
-              </a:spcAft>
-            </a:pPr>
-            <a:r>
-              <a:rPr sz="1500">
-                <a:solidFill>
-                  <a:srgbClr val="22282E"/>
-                </a:solidFill>
-              </a:rPr>
-              <a:t>•  sudo nmap -p445 --script smb-os-discovery,smb-enum-shares 192.168.56.101</a:t>
-            </a:r>
-          </a:p>
-          <a:p>
-            <a:pPr>
-              <a:spcAft>
-                <a:spcPts val="600"/>
-              </a:spcAft>
-            </a:pPr>
-            <a:r>
-              <a:rPr sz="1500">
-                <a:solidFill>
-                  <a:srgbClr val="22282E"/>
-                </a:solidFill>
-              </a:rPr>
-              <a:t>•  TLS/certificados:</a:t>
+              <a:t>•  Término — Definición concisa</a:t>
+            </a:r>
+          </a:p>
+          <a:p>
+            <a:pPr>
+              <a:spcAft>
+                <a:spcPts val="600"/>
+              </a:spcAft>
+            </a:pPr>
+            <a:r>
+              <a:rPr sz="1500">
+                <a:solidFill>
+                  <a:srgbClr val="22282E"/>
+                </a:solidFill>
+              </a:rPr>
+              <a:t>•  NSE — Nmap Scripting Engine: intérprete Lua embebido en Nmap</a:t>
+            </a:r>
+          </a:p>
+          <a:p>
+            <a:pPr>
+              <a:spcAft>
+                <a:spcPts val="600"/>
+              </a:spcAft>
+            </a:pPr>
+            <a:r>
+              <a:rPr sz="1500">
+                <a:solidFill>
+                  <a:srgbClr val="22282E"/>
+                </a:solidFill>
+              </a:rPr>
+              <a:t>•  Lua — Lenguaje de scripting ligero en el que se escriben los scripts NSE</a:t>
+            </a:r>
+          </a:p>
+          <a:p>
+            <a:pPr>
+              <a:spcAft>
+                <a:spcPts val="600"/>
+              </a:spcAft>
+            </a:pPr>
+            <a:r>
+              <a:rPr sz="1500">
+                <a:solidFill>
+                  <a:srgbClr val="22282E"/>
+                </a:solidFill>
+              </a:rPr>
+              <a:t>•  prerule — Fase previa al escaneo; no depende de ningún host</a:t>
+            </a:r>
+          </a:p>
+          <a:p>
+            <a:pPr>
+              <a:spcAft>
+                <a:spcPts val="600"/>
+              </a:spcAft>
+            </a:pPr>
+            <a:r>
+              <a:rPr sz="1500">
+                <a:solidFill>
+                  <a:srgbClr val="22282E"/>
+                </a:solidFill>
+              </a:rPr>
+              <a:t>•  hostrule — Se ejecuta una vez por host que cumpla la condición</a:t>
+            </a:r>
+          </a:p>
+          <a:p>
+            <a:pPr>
+              <a:spcAft>
+                <a:spcPts val="600"/>
+              </a:spcAft>
+            </a:pPr>
+            <a:r>
+              <a:rPr sz="1500">
+                <a:solidFill>
+                  <a:srgbClr val="22282E"/>
+                </a:solidFill>
+              </a:rPr>
+              <a:t>•  portrule — Se ejecuta una vez por puerto que cumpla la condición</a:t>
+            </a:r>
+          </a:p>
+          <a:p>
+            <a:pPr>
+              <a:spcAft>
+                <a:spcPts val="600"/>
+              </a:spcAft>
+            </a:pPr>
+            <a:r>
+              <a:rPr sz="1500">
+                <a:solidFill>
+                  <a:srgbClr val="22282E"/>
+                </a:solidFill>
+              </a:rPr>
+              <a:t>•  postrule — Se ejecuta al final para agregar resultados globales</a:t>
             </a:r>
           </a:p>
         </p:txBody>
@@ -4569,7 +4960,7 @@
                   <a:srgbClr val="0B3D2E"/>
                 </a:solidFill>
               </a:rPr>
-              <a:t>✍️ Ejercicios</a:t>
+              <a:t>🧰 Herramientas y preparación</a:t>
             </a:r>
           </a:p>
         </p:txBody>
@@ -4607,82 +4998,37 @@
                   <a:srgbClr val="22282E"/>
                 </a:solidFill>
               </a:rPr>
-              <a:t>•  Lista todos los scripts de la categoría vuln con ls /usr/share/nmap/scripts/ | grep vuln y elige tres para leer su --script-help.</a:t>
-            </a:r>
-          </a:p>
-          <a:p>
-            <a:pPr>
-              <a:spcAft>
-                <a:spcPts val="600"/>
-              </a:spcAft>
-            </a:pPr>
-            <a:r>
-              <a:rPr sz="1500">
-                <a:solidFill>
-                  <a:srgbClr val="22282E"/>
-                </a:solidFill>
-              </a:rPr>
-              <a:t>•  Ejecuta -sC y explica qué información añadió cada script a la salida.</a:t>
-            </a:r>
-          </a:p>
-          <a:p>
-            <a:pPr>
-              <a:spcAft>
-                <a:spcPts val="600"/>
-              </a:spcAft>
-            </a:pPr>
-            <a:r>
-              <a:rPr sz="1500">
-                <a:solidFill>
-                  <a:srgbClr val="22282E"/>
-                </a:solidFill>
-              </a:rPr>
-              <a:t>•  Usa ssl-enum-ciphers y evalúa si el objetivo soporta cifradores débiles.</a:t>
-            </a:r>
-          </a:p>
-          <a:p>
-            <a:pPr>
-              <a:spcAft>
-                <a:spcPts val="600"/>
-              </a:spcAft>
-            </a:pPr>
-            <a:r>
-              <a:rPr sz="1500">
-                <a:solidFill>
-                  <a:srgbClr val="22282E"/>
-                </a:solidFill>
-              </a:rPr>
-              <a:t>•  Modifica hello.nse para que también imprima el nombre del servicio detectado.</a:t>
-            </a:r>
-          </a:p>
-          <a:p>
-            <a:pPr>
-              <a:spcAft>
-                <a:spcPts val="600"/>
-              </a:spcAft>
-            </a:pPr>
-            <a:r>
-              <a:rPr sz="1500">
-                <a:solidFill>
-                  <a:srgbClr val="22282E"/>
-                </a:solidFill>
-              </a:rPr>
-              <a:t>•  Combina -sV con --script banner y compara con la detección de versión nativa.</a:t>
-            </a:r>
-          </a:p>
-          <a:p>
-            <a:pPr>
-              <a:spcAft>
-                <a:spcPts val="600"/>
-              </a:spcAft>
-            </a:pPr>
-            <a:r>
-              <a:rPr sz="1500">
-                <a:solidFill>
-                  <a:srgbClr val="22282E"/>
-                </a:solidFill>
-              </a:rPr>
-              <a:t>•  Investiga la diferencia entre un portrule y un hostrule en NSE.</a:t>
+              <a:t>•  Nmap 7.x (incluye ~600 scripts NSE en /usr/share/nmap/scripts/).</a:t>
+            </a:r>
+          </a:p>
+          <a:p>
+            <a:pPr>
+              <a:spcAft>
+                <a:spcPts val="600"/>
+              </a:spcAft>
+            </a:pPr>
+            <a:r>
+              <a:rPr sz="1500">
+                <a:solidFill>
+                  <a:srgbClr val="22282E"/>
+                </a:solidFill>
+              </a:rPr>
+              <a:t>•  Actualiza la base de datos:</a:t>
+            </a:r>
+          </a:p>
+          <a:p>
+            <a:pPr>
+              <a:spcAft>
+                <a:spcPts val="600"/>
+              </a:spcAft>
+            </a:pPr>
+            <a:r>
+              <a:rPr sz="1500">
+                <a:solidFill>
+                  <a:srgbClr val="22282E"/>
+                </a:solidFill>
+              </a:rPr>
+              <a:t>•  Objetivos de laboratorio: un servidor web, un SMB, un servicio con TLS. Contenedores deliberadamente vulnerables (aislados) para practicar scripts vuln.</a:t>
             </a:r>
           </a:p>
         </p:txBody>
@@ -4733,7 +5079,7 @@
                   <a:srgbClr val="0B3D2E"/>
                 </a:solidFill>
               </a:rPr>
-              <a:t>📝 Reto verificable</a:t>
+              <a:t>🧪 Laboratorio guiado</a:t>
             </a:r>
           </a:p>
         </p:txBody>
@@ -4771,22 +5117,97 @@
                   <a:srgbClr val="22282E"/>
                 </a:solidFill>
               </a:rPr>
-              <a:t>•  Escribe (o adapta) un escaneo NSE que enumere un servicio web de tu laboratorio y produzca: título de la página, cabeceras de seguridad presentes/ausentes y cifradores TLS soportados. Entrega el comando, la salida -oN y una breve interpretación de dos hallazgos de seguridad.</a:t>
-            </a:r>
-          </a:p>
-          <a:p>
-            <a:pPr>
-              <a:spcAft>
-                <a:spcPts val="600"/>
-              </a:spcAft>
-            </a:pPr>
-            <a:r>
-              <a:rPr sz="1500">
-                <a:solidFill>
-                  <a:srgbClr val="22282E"/>
-                </a:solidFill>
-              </a:rPr>
-              <a:t>•  Criterio de aceptación: la salida incluye los tres bloques de información y la interpretación identifica correctamente al menos una debilidad real (p. ej. falta de HSTS o soporte de un cifrador obsoleto).</a:t>
+              <a:t>•  Scripts por defecto (categoría default, seguros y útiles):</a:t>
+            </a:r>
+          </a:p>
+          <a:p>
+            <a:pPr>
+              <a:spcAft>
+                <a:spcPts val="600"/>
+              </a:spcAft>
+            </a:pPr>
+            <a:r>
+              <a:rPr sz="1500">
+                <a:solidFill>
+                  <a:srgbClr val="22282E"/>
+                </a:solidFill>
+              </a:rPr>
+              <a:t>•  Enumeración HTTP:</a:t>
+            </a:r>
+          </a:p>
+          <a:p>
+            <a:pPr>
+              <a:spcAft>
+                <a:spcPts val="600"/>
+              </a:spcAft>
+            </a:pPr>
+            <a:r>
+              <a:rPr sz="1500">
+                <a:solidFill>
+                  <a:srgbClr val="22282E"/>
+                </a:solidFill>
+              </a:rPr>
+              <a:t>•  Enumeración SMB:</a:t>
+            </a:r>
+          </a:p>
+          <a:p>
+            <a:pPr>
+              <a:spcAft>
+                <a:spcPts val="600"/>
+              </a:spcAft>
+            </a:pPr>
+            <a:r>
+              <a:rPr sz="1500">
+                <a:solidFill>
+                  <a:srgbClr val="22282E"/>
+                </a:solidFill>
+              </a:rPr>
+              <a:t>•  TLS/certificados:</a:t>
+            </a:r>
+          </a:p>
+          <a:p>
+            <a:pPr>
+              <a:spcAft>
+                <a:spcPts val="600"/>
+              </a:spcAft>
+            </a:pPr>
+            <a:r>
+              <a:rPr sz="1500">
+                <a:solidFill>
+                  <a:srgbClr val="22282E"/>
+                </a:solidFill>
+              </a:rPr>
+              <a:t>•  Categoría vuln (solo en tu laboratorio):</a:t>
+            </a:r>
+          </a:p>
+          <a:p>
+            <a:pPr>
+              <a:spcAft>
+                <a:spcPts val="600"/>
+              </a:spcAft>
+            </a:pPr>
+            <a:r>
+              <a:rPr sz="1500">
+                <a:solidFill>
+                  <a:srgbClr val="22282E"/>
+                </a:solidFill>
+              </a:rPr>
+              <a:t>•  Pasar argumentos (ejemplo con enumeración HTTP y user-agent):</a:t>
+            </a:r>
+          </a:p>
+          <a:p>
+            <a:pPr>
+              <a:spcAft>
+                <a:spcPts val="600"/>
+              </a:spcAft>
+            </a:pPr>
+            <a:r>
+              <a:rPr sz="1500">
+                <a:solidFill>
+                  <a:srgbClr val="22282E"/>
+                </a:solidFill>
+              </a:rPr>
+              <a:t>•  Consultar ayuda de un script:</a:t>
             </a:r>
           </a:p>
         </p:txBody>
